--- a/04_交付成品/序安_磷煤化工异常早期预警平台_黑客松路演_v13_ZH_REVIEW.pptx
+++ b/04_交付成品/序安_磷煤化工异常早期预警平台_黑客松路演_v13_ZH_REVIEW.pptx
@@ -1925,7 +1925,7 @@
       </p:grpSpPr>
       <p:pic>
         <p:nvPicPr>
-          <p:cNvPr id="2" name="Image 0" descr="/Users/rocalight/Desktop/All in one Data/01_PROJECTS/FDE任务/03_产品与解决方案/03_连续化工过程偏移副驾驶/90_构建与分析缓存/序安DCS智能预判平台_黑客松路演_v12_园区背景融合/assets/磷化工园区_封面主视觉_v01.png">    </p:cNvPr>
+          <p:cNvPr id="2" name="Image 0" descr="/Users/rocalight/Desktop/All in one Data/01_PROJECTS/FDE任务/03_产品与解决方案/03_连续化工过程偏移副驾驶/90_构建与分析缓存/序安磷煤化工异常早期预警平台_黑客松路演_v13/assets/磷化工园区_封面主视觉_v01.png">    </p:cNvPr>
           <p:cNvPicPr>
             <a:picLocks noChangeAspect="1"/>
           </p:cNvPicPr>
@@ -2007,7 +2007,7 @@
       </p:sp>
       <p:pic>
         <p:nvPicPr>
-          <p:cNvPr id="5" name="Image 1" descr="/Users/rocalight/Desktop/All in one Data/01_PROJECTS/FDE任务/03_产品与解决方案/03_连续化工过程偏移副驾驶/90_构建与分析缓存/序安DCS智能预判平台_黑客松路演_v12_园区背景融合/assets/序安候选标志_v03.svg">    </p:cNvPr>
+          <p:cNvPr id="5" name="Image 1" descr="/Users/rocalight/Desktop/All in one Data/01_PROJECTS/FDE任务/03_产品与解决方案/03_连续化工过程偏移副驾驶/apps/web/public/brand/xuanan-anomaly-intercept-v04.svg">    </p:cNvPr>
           <p:cNvPicPr>
             <a:picLocks noChangeAspect="1"/>
           </p:cNvPicPr>
@@ -2401,7 +2401,7 @@
       </p:grpSpPr>
       <p:pic>
         <p:nvPicPr>
-          <p:cNvPr id="2" name="Image 0" descr="/Users/rocalight/Desktop/All in one Data/01_PROJECTS/FDE任务/03_产品与解决方案/03_连续化工过程偏移副驾驶/90_构建与分析缓存/序安DCS智能预判平台_黑客松路演_v12_园区背景融合/assets/序安候选标志_v03.svg">    </p:cNvPr>
+          <p:cNvPr id="2" name="Image 0" descr="/Users/rocalight/Desktop/All in one Data/01_PROJECTS/FDE任务/03_产品与解决方案/03_连续化工过程偏移副驾驶/apps/web/public/brand/xuanan-anomaly-intercept-v04.svg">    </p:cNvPr>
           <p:cNvPicPr>
             <a:picLocks noChangeAspect="1"/>
           </p:cNvPicPr>
@@ -6672,8 +6672,8 @@
         </p:nvSpPr>
         <p:spPr>
           <a:xfrm>
-            <a:off x="987552" y="2258568"/>
-            <a:ext cx="2560320" cy="320040"/>
+            <a:off x="987552" y="2212848"/>
+            <a:ext cx="3931920" cy="347472"/>
           </a:xfrm>
           <a:prstGeom prst="rect">
             <a:avLst/>
@@ -6697,7 +6697,7 @@
                 <a:ea typeface="Source Han Sans SC" pitchFamily="34" charset="-122"/>
                 <a:cs typeface="Source Han Sans SC" pitchFamily="34" charset="-120"/>
               </a:rPr>
-              <a:t>滞后结果风险趋势</a:t>
+              <a:t>从“已发生”看向“可能发生”</a:t>
             </a:r>
             <a:endParaRPr lang="en-US" sz="2200" dirty="0"/>
           </a:p>
@@ -6711,8 +6711,8 @@
         </p:nvSpPr>
         <p:spPr>
           <a:xfrm>
-            <a:off x="4270248" y="2286000"/>
-            <a:ext cx="2788920" cy="237744"/>
+            <a:off x="4617720" y="2267712"/>
+            <a:ext cx="2487168" cy="237744"/>
           </a:xfrm>
           <a:prstGeom prst="rect">
             <a:avLst/>
@@ -6728,7 +6728,7 @@
               <a:buNone/>
             </a:pPr>
             <a:r>
-              <a:rPr lang="en-US" sz="1300" dirty="0">
+              <a:rPr lang="en-US" sz="1250" dirty="0">
                 <a:solidFill>
                   <a:srgbClr val="A7CBD2"/>
                 </a:solidFill>
@@ -6736,9 +6736,9 @@
                 <a:ea typeface="Source Han Sans SC" pitchFamily="34" charset="-122"/>
                 <a:cs typeface="Source Han Sans SC" pitchFamily="34" charset="-120"/>
               </a:rPr>
-              <a:t>公开数据验证｜非园区现场画面</a:t>
-            </a:r>
-            <a:endParaRPr lang="en-US" sz="1300" dirty="0"/>
+              <a:t>趋势结构示意 · 非真实效果数据</a:t>
+            </a:r>
+            <a:endParaRPr lang="en-US" sz="1250" dirty="0"/>
           </a:p>
         </p:txBody>
       </p:sp>
@@ -6750,14 +6750,151 @@
         </p:nvSpPr>
         <p:spPr>
           <a:xfrm>
-            <a:off x="1097280" y="5074920"/>
-            <a:ext cx="822960" cy="-320040"/>
+            <a:off x="1078992" y="2907792"/>
+            <a:ext cx="5989320" cy="576072"/>
+          </a:xfrm>
+          <a:prstGeom prst="rect">
+            <a:avLst/>
+          </a:prstGeom>
+          <a:solidFill>
+            <a:srgbClr val="E35B55">
+              <a:alpha val="18000"/>
+            </a:srgbClr>
+          </a:solidFill>
+          <a:ln w="12700">
+            <a:solidFill>
+              <a:srgbClr val="E35B55">
+                <a:alpha val="0"/>
+              </a:srgbClr>
+            </a:solidFill>
+            <a:prstDash val="solid"/>
+          </a:ln>
+        </p:spPr>
+      </p:sp>
+      <p:sp>
+        <p:nvSpPr>
+          <p:cNvPr id="9" name="Shape 7"/>
+          <p:cNvSpPr/>
+          <p:nvPr/>
+        </p:nvSpPr>
+        <p:spPr>
+          <a:xfrm>
+            <a:off x="1078992" y="3483864"/>
+            <a:ext cx="5989320" cy="0"/>
           </a:xfrm>
           <a:prstGeom prst="line">
             <a:avLst/>
           </a:prstGeom>
           <a:noFill/>
-          <a:ln w="50800">
+          <a:ln w="22860">
+            <a:solidFill>
+              <a:srgbClr val="E35B55"/>
+            </a:solidFill>
+            <a:prstDash val="solid"/>
+          </a:ln>
+        </p:spPr>
+      </p:sp>
+      <p:sp>
+        <p:nvSpPr>
+          <p:cNvPr id="10" name="Text 8"/>
+          <p:cNvSpPr/>
+          <p:nvPr/>
+        </p:nvSpPr>
+        <p:spPr>
+          <a:xfrm>
+            <a:off x="1225296" y="3063240"/>
+            <a:ext cx="1645920" cy="219456"/>
+          </a:xfrm>
+          <a:prstGeom prst="rect">
+            <a:avLst/>
+          </a:prstGeom>
+          <a:noFill/>
+          <a:ln/>
+        </p:spPr>
+        <p:txBody>
+          <a:bodyPr wrap="square" lIns="0" tIns="0" rIns="0" bIns="0" rtlCol="0" anchor="ctr"/>
+          <a:lstStyle/>
+          <a:p>
+            <a:pPr indent="0" marL="0">
+              <a:buNone/>
+            </a:pPr>
+            <a:r>
+              <a:rPr lang="en-US" sz="1250" b="1" dirty="0">
+                <a:solidFill>
+                  <a:srgbClr val="FFD6D3"/>
+                </a:solidFill>
+                <a:latin typeface="Source Han Sans SC" pitchFamily="34" charset="0"/>
+                <a:ea typeface="Source Han Sans SC" pitchFamily="34" charset="-122"/>
+                <a:cs typeface="Source Han Sans SC" pitchFamily="34" charset="-120"/>
+              </a:rPr>
+              <a:t>风险阈值（示意）</a:t>
+            </a:r>
+            <a:endParaRPr lang="en-US" sz="1250" dirty="0"/>
+          </a:p>
+        </p:txBody>
+      </p:sp>
+      <p:sp>
+        <p:nvSpPr>
+          <p:cNvPr id="11" name="Shape 9"/>
+          <p:cNvSpPr/>
+          <p:nvPr/>
+        </p:nvSpPr>
+        <p:spPr>
+          <a:xfrm>
+            <a:off x="1078992" y="5257800"/>
+            <a:ext cx="5989320" cy="0"/>
+          </a:xfrm>
+          <a:prstGeom prst="line">
+            <a:avLst/>
+          </a:prstGeom>
+          <a:noFill/>
+          <a:ln w="15240">
+            <a:solidFill>
+              <a:srgbClr val="5F8390"/>
+            </a:solidFill>
+            <a:prstDash val="solid"/>
+          </a:ln>
+        </p:spPr>
+      </p:sp>
+      <p:sp>
+        <p:nvSpPr>
+          <p:cNvPr id="12" name="Shape 10"/>
+          <p:cNvSpPr/>
+          <p:nvPr/>
+        </p:nvSpPr>
+        <p:spPr>
+          <a:xfrm>
+            <a:off x="1078992" y="2834640"/>
+            <a:ext cx="0" cy="2423160"/>
+          </a:xfrm>
+          <a:prstGeom prst="line">
+            <a:avLst/>
+          </a:prstGeom>
+          <a:noFill/>
+          <a:ln w="15240">
+            <a:solidFill>
+              <a:srgbClr val="5F8390"/>
+            </a:solidFill>
+            <a:prstDash val="solid"/>
+          </a:ln>
+        </p:spPr>
+      </p:sp>
+      <p:sp>
+        <p:nvSpPr>
+          <p:cNvPr id="13" name="Shape 11"/>
+          <p:cNvSpPr/>
+          <p:nvPr/>
+        </p:nvSpPr>
+        <p:spPr>
+          <a:xfrm>
+            <a:off x="1170432" y="4828032"/>
+            <a:ext cx="612648" cy="-91440"/>
+          </a:xfrm>
+          <a:prstGeom prst="line">
+            <a:avLst/>
+          </a:prstGeom>
+          <a:noFill/>
+          <a:ln w="44450">
             <a:solidFill>
               <a:srgbClr val="64E1DF"/>
             </a:solidFill>
@@ -6767,20 +6904,20 @@
       </p:sp>
       <p:sp>
         <p:nvSpPr>
-          <p:cNvPr id="9" name="Shape 7"/>
-          <p:cNvSpPr/>
-          <p:nvPr/>
-        </p:nvSpPr>
-        <p:spPr>
-          <a:xfrm>
-            <a:off x="1920240" y="4754880"/>
-            <a:ext cx="822960" cy="118872"/>
+          <p:cNvPr id="14" name="Shape 12"/>
+          <p:cNvSpPr/>
+          <p:nvPr/>
+        </p:nvSpPr>
+        <p:spPr>
+          <a:xfrm>
+            <a:off x="1783080" y="4736592"/>
+            <a:ext cx="612648" cy="54864"/>
           </a:xfrm>
           <a:prstGeom prst="line">
             <a:avLst/>
           </a:prstGeom>
           <a:noFill/>
-          <a:ln w="50800">
+          <a:ln w="44450">
             <a:solidFill>
               <a:srgbClr val="64E1DF"/>
             </a:solidFill>
@@ -6790,20 +6927,20 @@
       </p:sp>
       <p:sp>
         <p:nvSpPr>
-          <p:cNvPr id="10" name="Shape 8"/>
-          <p:cNvSpPr/>
-          <p:nvPr/>
-        </p:nvSpPr>
-        <p:spPr>
-          <a:xfrm>
-            <a:off x="2743200" y="4873752"/>
-            <a:ext cx="822960" cy="-466344"/>
+          <p:cNvPr id="15" name="Shape 13"/>
+          <p:cNvSpPr/>
+          <p:nvPr/>
+        </p:nvSpPr>
+        <p:spPr>
+          <a:xfrm>
+            <a:off x="2395728" y="4791456"/>
+            <a:ext cx="612648" cy="-192024"/>
           </a:xfrm>
           <a:prstGeom prst="line">
             <a:avLst/>
           </a:prstGeom>
           <a:noFill/>
-          <a:ln w="50800">
+          <a:ln w="44450">
             <a:solidFill>
               <a:srgbClr val="64E1DF"/>
             </a:solidFill>
@@ -6813,20 +6950,20 @@
       </p:sp>
       <p:sp>
         <p:nvSpPr>
-          <p:cNvPr id="11" name="Shape 9"/>
-          <p:cNvSpPr/>
-          <p:nvPr/>
-        </p:nvSpPr>
-        <p:spPr>
-          <a:xfrm>
-            <a:off x="3566160" y="4407408"/>
-            <a:ext cx="822960" cy="-365760"/>
+          <p:cNvPr id="16" name="Shape 14"/>
+          <p:cNvSpPr/>
+          <p:nvPr/>
+        </p:nvSpPr>
+        <p:spPr>
+          <a:xfrm>
+            <a:off x="3008376" y="4599432"/>
+            <a:ext cx="612648" cy="-109728"/>
           </a:xfrm>
           <a:prstGeom prst="line">
             <a:avLst/>
           </a:prstGeom>
           <a:noFill/>
-          <a:ln w="50800">
+          <a:ln w="44450">
             <a:solidFill>
               <a:srgbClr val="64E1DF"/>
             </a:solidFill>
@@ -6836,20 +6973,20 @@
       </p:sp>
       <p:sp>
         <p:nvSpPr>
-          <p:cNvPr id="12" name="Shape 10"/>
-          <p:cNvSpPr/>
-          <p:nvPr/>
-        </p:nvSpPr>
-        <p:spPr>
-          <a:xfrm>
-            <a:off x="4389120" y="4041648"/>
-            <a:ext cx="822960" cy="146304"/>
+          <p:cNvPr id="17" name="Shape 15"/>
+          <p:cNvSpPr/>
+          <p:nvPr/>
+        </p:nvSpPr>
+        <p:spPr>
+          <a:xfrm>
+            <a:off x="3621024" y="4489704"/>
+            <a:ext cx="612648" cy="-173736"/>
           </a:xfrm>
           <a:prstGeom prst="line">
             <a:avLst/>
           </a:prstGeom>
           <a:noFill/>
-          <a:ln w="50800">
+          <a:ln w="44450">
             <a:solidFill>
               <a:srgbClr val="64E1DF"/>
             </a:solidFill>
@@ -6859,20 +6996,20 @@
       </p:sp>
       <p:sp>
         <p:nvSpPr>
-          <p:cNvPr id="13" name="Shape 11"/>
-          <p:cNvSpPr/>
-          <p:nvPr/>
-        </p:nvSpPr>
-        <p:spPr>
-          <a:xfrm>
-            <a:off x="5212080" y="4187952"/>
-            <a:ext cx="822960" cy="-768096"/>
+          <p:cNvPr id="18" name="Shape 16"/>
+          <p:cNvSpPr/>
+          <p:nvPr/>
+        </p:nvSpPr>
+        <p:spPr>
+          <a:xfrm>
+            <a:off x="4233672" y="4315968"/>
+            <a:ext cx="612648" cy="-155448"/>
           </a:xfrm>
           <a:prstGeom prst="line">
             <a:avLst/>
           </a:prstGeom>
           <a:noFill/>
-          <a:ln w="50800">
+          <a:ln w="44450">
             <a:solidFill>
               <a:srgbClr val="64E1DF"/>
             </a:solidFill>
@@ -6882,66 +7019,20 @@
       </p:sp>
       <p:sp>
         <p:nvSpPr>
-          <p:cNvPr id="14" name="Shape 12"/>
-          <p:cNvSpPr/>
-          <p:nvPr/>
-        </p:nvSpPr>
-        <p:spPr>
-          <a:xfrm>
-            <a:off x="6035040" y="3419856"/>
-            <a:ext cx="777240" cy="-420624"/>
+          <p:cNvPr id="19" name="Shape 17"/>
+          <p:cNvSpPr/>
+          <p:nvPr/>
+        </p:nvSpPr>
+        <p:spPr>
+          <a:xfrm>
+            <a:off x="4846320" y="4160520"/>
+            <a:ext cx="530352" cy="-228600"/>
           </a:xfrm>
           <a:prstGeom prst="line">
             <a:avLst/>
           </a:prstGeom>
           <a:noFill/>
-          <a:ln w="50800">
-            <a:solidFill>
-              <a:srgbClr val="64E1DF"/>
-            </a:solidFill>
-            <a:prstDash val="solid"/>
-          </a:ln>
-        </p:spPr>
-      </p:sp>
-      <p:sp>
-        <p:nvSpPr>
-          <p:cNvPr id="15" name="Shape 13"/>
-          <p:cNvSpPr/>
-          <p:nvPr/>
-        </p:nvSpPr>
-        <p:spPr>
-          <a:xfrm>
-            <a:off x="1051560" y="5349240"/>
-            <a:ext cx="5806440" cy="0"/>
-          </a:xfrm>
-          <a:prstGeom prst="line">
-            <a:avLst/>
-          </a:prstGeom>
-          <a:noFill/>
-          <a:ln w="12700">
-            <a:solidFill>
-              <a:srgbClr val="5F8390"/>
-            </a:solidFill>
-            <a:prstDash val="solid"/>
-          </a:ln>
-        </p:spPr>
-      </p:sp>
-      <p:sp>
-        <p:nvSpPr>
-          <p:cNvPr id="16" name="Shape 14"/>
-          <p:cNvSpPr/>
-          <p:nvPr/>
-        </p:nvSpPr>
-        <p:spPr>
-          <a:xfrm>
-            <a:off x="5715000" y="2788920"/>
-            <a:ext cx="0" cy="2560320"/>
-          </a:xfrm>
-          <a:prstGeom prst="line">
-            <a:avLst/>
-          </a:prstGeom>
-          <a:noFill/>
-          <a:ln w="25400">
+          <a:ln w="44450">
             <a:solidFill>
               <a:srgbClr val="F2A93B"/>
             </a:solidFill>
@@ -6951,14 +7042,133 @@
       </p:sp>
       <p:sp>
         <p:nvSpPr>
-          <p:cNvPr id="17" name="Text 15"/>
-          <p:cNvSpPr/>
-          <p:nvPr/>
-        </p:nvSpPr>
-        <p:spPr>
-          <a:xfrm>
-            <a:off x="5806440" y="2788920"/>
-            <a:ext cx="1051560" cy="274320"/>
+          <p:cNvPr id="20" name="Shape 18"/>
+          <p:cNvSpPr/>
+          <p:nvPr/>
+        </p:nvSpPr>
+        <p:spPr>
+          <a:xfrm>
+            <a:off x="5376672" y="3931920"/>
+            <a:ext cx="530352" cy="-402336"/>
+          </a:xfrm>
+          <a:prstGeom prst="line">
+            <a:avLst/>
+          </a:prstGeom>
+          <a:noFill/>
+          <a:ln w="44450">
+            <a:solidFill>
+              <a:srgbClr val="F2A93B"/>
+            </a:solidFill>
+            <a:prstDash val="solid"/>
+          </a:ln>
+        </p:spPr>
+      </p:sp>
+      <p:sp>
+        <p:nvSpPr>
+          <p:cNvPr id="21" name="Shape 19"/>
+          <p:cNvSpPr/>
+          <p:nvPr/>
+        </p:nvSpPr>
+        <p:spPr>
+          <a:xfrm>
+            <a:off x="5907024" y="3529584"/>
+            <a:ext cx="530352" cy="-301752"/>
+          </a:xfrm>
+          <a:prstGeom prst="line">
+            <a:avLst/>
+          </a:prstGeom>
+          <a:noFill/>
+          <a:ln w="44450">
+            <a:solidFill>
+              <a:srgbClr val="F2A93B"/>
+            </a:solidFill>
+            <a:prstDash val="solid"/>
+          </a:ln>
+        </p:spPr>
+      </p:sp>
+      <p:sp>
+        <p:nvSpPr>
+          <p:cNvPr id="22" name="Shape 20"/>
+          <p:cNvSpPr/>
+          <p:nvPr/>
+        </p:nvSpPr>
+        <p:spPr>
+          <a:xfrm>
+            <a:off x="6437376" y="3227832"/>
+            <a:ext cx="512064" cy="-137160"/>
+          </a:xfrm>
+          <a:prstGeom prst="line">
+            <a:avLst/>
+          </a:prstGeom>
+          <a:noFill/>
+          <a:ln w="44450">
+            <a:solidFill>
+              <a:srgbClr val="F2A93B"/>
+            </a:solidFill>
+            <a:prstDash val="solid"/>
+          </a:ln>
+        </p:spPr>
+      </p:sp>
+      <p:sp>
+        <p:nvSpPr>
+          <p:cNvPr id="23" name="Shape 21"/>
+          <p:cNvSpPr/>
+          <p:nvPr/>
+        </p:nvSpPr>
+        <p:spPr>
+          <a:xfrm>
+            <a:off x="4846320" y="2834640"/>
+            <a:ext cx="0" cy="2423160"/>
+          </a:xfrm>
+          <a:prstGeom prst="line">
+            <a:avLst/>
+          </a:prstGeom>
+          <a:noFill/>
+          <a:ln w="17780">
+            <a:solidFill>
+              <a:srgbClr val="FFFFFF">
+                <a:alpha val="65000"/>
+              </a:srgbClr>
+            </a:solidFill>
+            <a:prstDash val="solid"/>
+          </a:ln>
+        </p:spPr>
+      </p:sp>
+      <p:sp>
+        <p:nvSpPr>
+          <p:cNvPr id="24" name="Shape 22"/>
+          <p:cNvSpPr/>
+          <p:nvPr/>
+        </p:nvSpPr>
+        <p:spPr>
+          <a:xfrm>
+            <a:off x="4754880" y="4069080"/>
+            <a:ext cx="182880" cy="182880"/>
+          </a:xfrm>
+          <a:prstGeom prst="ellipse">
+            <a:avLst/>
+          </a:prstGeom>
+          <a:solidFill>
+            <a:srgbClr val="FFFFFF"/>
+          </a:solidFill>
+          <a:ln w="12700">
+            <a:solidFill>
+              <a:srgbClr val="FFFFFF"/>
+            </a:solidFill>
+            <a:prstDash val="solid"/>
+          </a:ln>
+        </p:spPr>
+      </p:sp>
+      <p:sp>
+        <p:nvSpPr>
+          <p:cNvPr id="25" name="Text 23"/>
+          <p:cNvSpPr/>
+          <p:nvPr/>
+        </p:nvSpPr>
+        <p:spPr>
+          <a:xfrm>
+            <a:off x="4352544" y="5376672"/>
+            <a:ext cx="1024128" cy="228600"/>
           </a:xfrm>
           <a:prstGeom prst="rect">
             <a:avLst/>
@@ -6970,11 +7180,89 @@
           <a:bodyPr wrap="square" lIns="0" tIns="0" rIns="0" bIns="0" rtlCol="0" anchor="ctr"/>
           <a:lstStyle/>
           <a:p>
+            <a:pPr algn="ctr" indent="0" marL="0">
+              <a:buNone/>
+            </a:pPr>
+            <a:r>
+              <a:rPr lang="en-US" sz="1250" b="1" dirty="0">
+                <a:solidFill>
+                  <a:srgbClr val="FFFFFF"/>
+                </a:solidFill>
+                <a:latin typeface="Source Han Sans SC" pitchFamily="34" charset="0"/>
+                <a:ea typeface="Source Han Sans SC" pitchFamily="34" charset="-122"/>
+                <a:cs typeface="Source Han Sans SC" pitchFamily="34" charset="-120"/>
+              </a:rPr>
+              <a:t>当前时刻</a:t>
+            </a:r>
+            <a:endParaRPr lang="en-US" sz="1250" dirty="0"/>
+          </a:p>
+        </p:txBody>
+      </p:sp>
+      <p:sp>
+        <p:nvSpPr>
+          <p:cNvPr id="26" name="Text 24"/>
+          <p:cNvSpPr/>
+          <p:nvPr/>
+        </p:nvSpPr>
+        <p:spPr>
+          <a:xfrm>
+            <a:off x="1225296" y="5376672"/>
+            <a:ext cx="1325880" cy="228600"/>
+          </a:xfrm>
+          <a:prstGeom prst="rect">
+            <a:avLst/>
+          </a:prstGeom>
+          <a:noFill/>
+          <a:ln/>
+        </p:spPr>
+        <p:txBody>
+          <a:bodyPr wrap="square" lIns="0" tIns="0" rIns="0" bIns="0" rtlCol="0" anchor="ctr"/>
+          <a:lstStyle/>
+          <a:p>
             <a:pPr indent="0" marL="0">
               <a:buNone/>
             </a:pPr>
             <a:r>
-              <a:rPr lang="en-US" sz="1500" b="1" dirty="0">
+              <a:rPr lang="en-US" sz="1250" dirty="0">
+                <a:solidFill>
+                  <a:srgbClr val="64E1DF"/>
+                </a:solidFill>
+                <a:latin typeface="Source Han Sans SC" pitchFamily="34" charset="0"/>
+                <a:ea typeface="Source Han Sans SC" pitchFamily="34" charset="-122"/>
+                <a:cs typeface="Source Han Sans SC" pitchFamily="34" charset="-120"/>
+              </a:rPr>
+              <a:t>已观测结果</a:t>
+            </a:r>
+            <a:endParaRPr lang="en-US" sz="1250" dirty="0"/>
+          </a:p>
+        </p:txBody>
+      </p:sp>
+      <p:sp>
+        <p:nvSpPr>
+          <p:cNvPr id="27" name="Text 25"/>
+          <p:cNvSpPr/>
+          <p:nvPr/>
+        </p:nvSpPr>
+        <p:spPr>
+          <a:xfrm>
+            <a:off x="5650992" y="5376672"/>
+            <a:ext cx="1298448" cy="228600"/>
+          </a:xfrm>
+          <a:prstGeom prst="rect">
+            <a:avLst/>
+          </a:prstGeom>
+          <a:noFill/>
+          <a:ln/>
+        </p:spPr>
+        <p:txBody>
+          <a:bodyPr wrap="square" lIns="0" tIns="0" rIns="0" bIns="0" rtlCol="0" anchor="ctr"/>
+          <a:lstStyle/>
+          <a:p>
+            <a:pPr algn="r" indent="0" marL="0">
+              <a:buNone/>
+            </a:pPr>
+            <a:r>
+              <a:rPr lang="en-US" sz="1250" dirty="0">
                 <a:solidFill>
                   <a:srgbClr val="F2A93B"/>
                 </a:solidFill>
@@ -6982,15 +7270,93 @@
                 <a:ea typeface="Source Han Sans SC" pitchFamily="34" charset="-122"/>
                 <a:cs typeface="Source Han Sans SC" pitchFamily="34" charset="-120"/>
               </a:rPr>
-              <a:t>风险窗口</a:t>
-            </a:r>
-            <a:endParaRPr lang="en-US" sz="1500" dirty="0"/>
-          </a:p>
-        </p:txBody>
-      </p:sp>
-      <p:sp>
-        <p:nvSpPr>
-          <p:cNvPr id="18" name="Shape 16"/>
+              <a:t>未来预测区间</a:t>
+            </a:r>
+            <a:endParaRPr lang="en-US" sz="1250" dirty="0"/>
+          </a:p>
+        </p:txBody>
+      </p:sp>
+      <p:sp>
+        <p:nvSpPr>
+          <p:cNvPr id="28" name="Text 26"/>
+          <p:cNvSpPr/>
+          <p:nvPr/>
+        </p:nvSpPr>
+        <p:spPr>
+          <a:xfrm>
+            <a:off x="3767328" y="3968496"/>
+            <a:ext cx="914400" cy="228600"/>
+          </a:xfrm>
+          <a:prstGeom prst="rect">
+            <a:avLst/>
+          </a:prstGeom>
+          <a:noFill/>
+          <a:ln/>
+        </p:spPr>
+        <p:txBody>
+          <a:bodyPr wrap="square" lIns="0" tIns="0" rIns="0" bIns="0" rtlCol="0" anchor="ctr"/>
+          <a:lstStyle/>
+          <a:p>
+            <a:pPr indent="0" marL="0">
+              <a:buNone/>
+            </a:pPr>
+            <a:r>
+              <a:rPr lang="en-US" sz="1300" dirty="0">
+                <a:solidFill>
+                  <a:srgbClr val="D2E7EA"/>
+                </a:solidFill>
+                <a:latin typeface="Source Han Sans SC" pitchFamily="34" charset="0"/>
+                <a:ea typeface="Source Han Sans SC" pitchFamily="34" charset="-122"/>
+                <a:cs typeface="Source Han Sans SC" pitchFamily="34" charset="-120"/>
+              </a:rPr>
+              <a:t>尚未越界</a:t>
+            </a:r>
+            <a:endParaRPr lang="en-US" sz="1300" dirty="0"/>
+          </a:p>
+        </p:txBody>
+      </p:sp>
+      <p:sp>
+        <p:nvSpPr>
+          <p:cNvPr id="29" name="Text 27"/>
+          <p:cNvSpPr/>
+          <p:nvPr/>
+        </p:nvSpPr>
+        <p:spPr>
+          <a:xfrm>
+            <a:off x="5532120" y="2779776"/>
+            <a:ext cx="1481328" cy="274320"/>
+          </a:xfrm>
+          <a:prstGeom prst="rect">
+            <a:avLst/>
+          </a:prstGeom>
+          <a:noFill/>
+          <a:ln/>
+        </p:spPr>
+        <p:txBody>
+          <a:bodyPr wrap="square" lIns="0" tIns="0" rIns="0" bIns="0" rtlCol="0" anchor="ctr"/>
+          <a:lstStyle/>
+          <a:p>
+            <a:pPr algn="r" indent="0" marL="0">
+              <a:buNone/>
+            </a:pPr>
+            <a:r>
+              <a:rPr lang="en-US" sz="1400" b="1" dirty="0">
+                <a:solidFill>
+                  <a:srgbClr val="F2A93B"/>
+                </a:solidFill>
+                <a:latin typeface="Source Han Sans SC" pitchFamily="34" charset="0"/>
+                <a:ea typeface="Source Han Sans SC" pitchFamily="34" charset="-122"/>
+                <a:cs typeface="Source Han Sans SC" pitchFamily="34" charset="-120"/>
+              </a:rPr>
+              <a:t>预测进入风险区</a:t>
+            </a:r>
+            <a:endParaRPr lang="en-US" sz="1400" dirty="0"/>
+          </a:p>
+        </p:txBody>
+      </p:sp>
+      <p:sp>
+        <p:nvSpPr>
+          <p:cNvPr id="30" name="Shape 28"/>
           <p:cNvSpPr/>
           <p:nvPr/>
         </p:nvSpPr>
@@ -7017,7 +7383,7 @@
       </p:sp>
       <p:sp>
         <p:nvSpPr>
-          <p:cNvPr id="19" name="Text 17"/>
+          <p:cNvPr id="31" name="Text 29"/>
           <p:cNvSpPr/>
           <p:nvPr/>
         </p:nvSpPr>
@@ -7056,7 +7422,7 @@
       </p:sp>
       <p:sp>
         <p:nvSpPr>
-          <p:cNvPr id="20" name="Text 18"/>
+          <p:cNvPr id="32" name="Text 30"/>
           <p:cNvSpPr/>
           <p:nvPr/>
         </p:nvSpPr>
@@ -7097,7 +7463,7 @@
       </p:sp>
       <p:sp>
         <p:nvSpPr>
-          <p:cNvPr id="21" name="Shape 19"/>
+          <p:cNvPr id="33" name="Shape 31"/>
           <p:cNvSpPr/>
           <p:nvPr/>
         </p:nvSpPr>
@@ -7124,7 +7490,7 @@
       </p:sp>
       <p:sp>
         <p:nvSpPr>
-          <p:cNvPr id="22" name="Text 20"/>
+          <p:cNvPr id="34" name="Text 32"/>
           <p:cNvSpPr/>
           <p:nvPr/>
         </p:nvSpPr>
@@ -7163,7 +7529,7 @@
       </p:sp>
       <p:sp>
         <p:nvSpPr>
-          <p:cNvPr id="23" name="Text 21"/>
+          <p:cNvPr id="35" name="Text 33"/>
           <p:cNvSpPr/>
           <p:nvPr/>
         </p:nvSpPr>
@@ -7202,7 +7568,7 @@
       </p:sp>
       <p:sp>
         <p:nvSpPr>
-          <p:cNvPr id="24" name="Text 22"/>
+          <p:cNvPr id="36" name="Text 34"/>
           <p:cNvSpPr/>
           <p:nvPr/>
         </p:nvSpPr>
@@ -7241,7 +7607,7 @@
       </p:sp>
       <p:sp>
         <p:nvSpPr>
-          <p:cNvPr id="25" name="Shape 23"/>
+          <p:cNvPr id="37" name="Shape 35"/>
           <p:cNvSpPr/>
           <p:nvPr/>
         </p:nvSpPr>
@@ -7268,7 +7634,7 @@
       </p:sp>
       <p:sp>
         <p:nvSpPr>
-          <p:cNvPr id="26" name="Text 24"/>
+          <p:cNvPr id="38" name="Text 36"/>
           <p:cNvSpPr/>
           <p:nvPr/>
         </p:nvSpPr>
@@ -7307,7 +7673,7 @@
       </p:sp>
       <p:sp>
         <p:nvSpPr>
-          <p:cNvPr id="27" name="Text 25"/>
+          <p:cNvPr id="39" name="Text 37"/>
           <p:cNvSpPr/>
           <p:nvPr/>
         </p:nvSpPr>
@@ -7365,7 +7731,7 @@
       </p:sp>
       <p:sp>
         <p:nvSpPr>
-          <p:cNvPr id="28" name="Text 26"/>
+          <p:cNvPr id="40" name="Text 38"/>
           <p:cNvSpPr/>
           <p:nvPr/>
         </p:nvSpPr>
@@ -7600,7 +7966,7 @@
       </p:sp>
       <p:pic>
         <p:nvPicPr>
-          <p:cNvPr id="5" name="Image 0" descr="/Users/rocalight/Desktop/All in one Data/01_PROJECTS/FDE任务/03_产品与解决方案/03_连续化工过程偏移副驾驶/90_构建与分析缓存/序安DCS智能预判平台_黑客松路演_v12_园区背景融合/assets/操作员AI追问.png">    </p:cNvPr>
+          <p:cNvPr id="5" name="Image 0" descr="/Users/rocalight/Desktop/All in one Data/01_PROJECTS/FDE任务/03_产品与解决方案/03_连续化工过程偏移副驾驶/90_构建与分析缓存/序安磷煤化工异常早期预警平台_黑客松路演_v13/assets/操作员AI追问.png">    </p:cNvPr>
           <p:cNvPicPr>
             <a:picLocks noChangeAspect="1"/>
           </p:cNvPicPr>
@@ -8376,7 +8742,7 @@
       </p:sp>
       <p:pic>
         <p:nvPicPr>
-          <p:cNvPr id="5" name="Image 0" descr="/Users/rocalight/Desktop/All in one Data/01_PROJECTS/FDE任务/03_产品与解决方案/03_连续化工过程偏移副驾驶/90_构建与分析缓存/序安DCS智能预判平台_黑客松路演_v12_园区背景融合/assets/TEP_偏移捕获.png">    </p:cNvPr>
+          <p:cNvPr id="5" name="Image 0" descr="/Users/rocalight/Desktop/All in one Data/01_PROJECTS/FDE任务/03_产品与解决方案/03_连续化工过程偏移副驾驶/90_构建与分析缓存/序安磷煤化工异常早期预警平台_黑客松路演_v13/assets/TEP_偏移捕获.png">    </p:cNvPr>
           <p:cNvPicPr>
             <a:picLocks noChangeAspect="1"/>
           </p:cNvPicPr>
@@ -8400,7 +8766,7 @@
       </p:pic>
       <p:pic>
         <p:nvPicPr>
-          <p:cNvPr id="6" name="Image 1" descr="/Users/rocalight/Desktop/All in one Data/01_PROJECTS/FDE任务/03_产品与解决方案/03_连续化工过程偏移副驾驶/90_构建与分析缓存/序安DCS智能预判平台_黑客松路演_v12_园区背景融合/assets/TEP_AI证据解释.png">    </p:cNvPr>
+          <p:cNvPr id="6" name="Image 1" descr="/Users/rocalight/Desktop/All in one Data/01_PROJECTS/FDE任务/03_产品与解决方案/03_连续化工过程偏移副驾驶/90_构建与分析缓存/序安磷煤化工异常早期预警平台_黑客松路演_v13/assets/TEP_AI证据解释.png">    </p:cNvPr>
           <p:cNvPicPr>
             <a:picLocks noChangeAspect="1"/>
           </p:cNvPicPr>
